--- a/docs/slides/result-before-after.pptx
+++ b/docs/slides/result-before-after.pptx
@@ -4113,7 +4113,7 @@
                 <a:ea typeface="GT Walsheim Pro"/>
                 <a:cs typeface="GT Walsheim Pro"/>
               </a:rPr>
-              <a:t>НЕ БУДЕТ РЕШЕНО</a:t>
+              <a:t>В РАЗВИТИИ ПОСЛЕ ЗАПУСКА</a:t>
             </a:r>
           </a:p>
         </p:txBody>
